--- a/PasswordSecurity_ppt_boldi_norbi.pptx
+++ b/PasswordSecurity_ppt_boldi_norbi.pptx
@@ -124,7 +124,8 @@
 <file path=ppt/revisionInfo.xml><?xml version="1.0" encoding="utf-8"?>
 <p1510:revInfo xmlns:a="http://schemas.openxmlformats.org/drawingml/2006/main" xmlns:r="http://schemas.openxmlformats.org/officeDocument/2006/relationships" xmlns:p1510="http://schemas.microsoft.com/office/powerpoint/2015/10/main">
   <p1510:revLst>
-    <p1510:client id="{6F0D38B7-19E1-B82A-0519-856751E837DD}" v="106" dt="2026-02-23T08:02:13.531"/>
+    <p1510:client id="{1174B0B3-E7C2-6E5D-46DA-3ECD3360A4CA}" v="68" dt="2026-03-02T09:23:08.039"/>
+    <p1510:client id="{8BED386F-DEF7-83FA-2781-3652540FB0DC}" v="40" dt="2026-03-02T09:30:54.665"/>
   </p1510:revLst>
 </p1510:revInfo>
 </file>
@@ -278,7 +279,7 @@
           <a:p>
             <a:fld id="{C4270120-CDFC-48DE-A6EA-6DEEDD0E436A}" type="datetimeFigureOut">
               <a:rPr lang="en-US" dirty="0"/>
-              <a:t>2/22/2026</a:t>
+              <a:t>3/5/2026</a:t>
             </a:fld>
             <a:endParaRPr lang="en-US" dirty="0"/>
           </a:p>
@@ -572,7 +573,7 @@
           <a:p>
             <a:fld id="{2A1F5BA7-0A17-4D30-9B66-E29324151C73}" type="datetimeFigureOut">
               <a:rPr lang="en-US" dirty="0"/>
-              <a:t>2/22/2026</a:t>
+              <a:t>3/5/2026</a:t>
             </a:fld>
             <a:endParaRPr lang="en-US" dirty="0"/>
           </a:p>
@@ -828,7 +829,7 @@
           <a:p>
             <a:fld id="{76BEBB1B-D40A-4DB9-B3DE-BAAE675B83CD}" type="datetimeFigureOut">
               <a:rPr lang="en-US" dirty="0"/>
-              <a:t>2/22/2026</a:t>
+              <a:t>3/5/2026</a:t>
             </a:fld>
             <a:endParaRPr lang="en-US" dirty="0"/>
           </a:p>
@@ -1084,7 +1085,7 @@
           <a:p>
             <a:fld id="{A3C9FAAF-C467-4C93-8ECD-39AF5A14D498}" type="datetimeFigureOut">
               <a:rPr lang="en-US" dirty="0"/>
-              <a:t>2/22/2026</a:t>
+              <a:t>3/5/2026</a:t>
             </a:fld>
             <a:endParaRPr lang="en-US" dirty="0"/>
           </a:p>
@@ -1409,7 +1410,7 @@
           <a:p>
             <a:fld id="{3E37E480-B2BA-4553-A144-61E7F75833ED}" type="datetimeFigureOut">
               <a:rPr lang="en-US" dirty="0"/>
-              <a:t>2/22/2026</a:t>
+              <a:t>3/5/2026</a:t>
             </a:fld>
             <a:endParaRPr lang="en-US" dirty="0"/>
           </a:p>
@@ -1763,7 +1764,7 @@
           <a:p>
             <a:fld id="{390E682A-6B53-4B08-AE4D-4C5E659103CC}" type="datetimeFigureOut">
               <a:rPr lang="en-US" dirty="0"/>
-              <a:t>2/22/2026</a:t>
+              <a:t>3/5/2026</a:t>
             </a:fld>
             <a:endParaRPr lang="en-US" dirty="0"/>
           </a:p>
@@ -2279,7 +2280,7 @@
           <a:p>
             <a:fld id="{7C69F0F6-BEBB-4894-ABB2-75C5CBE0DDB9}" type="datetimeFigureOut">
               <a:rPr lang="en-US" dirty="0"/>
-              <a:t>2/22/2026</a:t>
+              <a:t>3/5/2026</a:t>
             </a:fld>
             <a:endParaRPr lang="en-US" dirty="0"/>
           </a:p>
@@ -2595,7 +2596,7 @@
           <a:p>
             <a:fld id="{8B3E9E5F-17D9-4A30-9DA3-64E46A6DF111}" type="datetimeFigureOut">
               <a:rPr lang="en-US" dirty="0"/>
-              <a:t>2/22/2026</a:t>
+              <a:t>3/5/2026</a:t>
             </a:fld>
             <a:endParaRPr lang="en-US" dirty="0"/>
           </a:p>
@@ -2712,7 +2713,7 @@
           <a:p>
             <a:fld id="{033AC5F0-3BC3-4718-BCCA-24B5655EC864}" type="datetimeFigureOut">
               <a:rPr lang="en-US" dirty="0"/>
-              <a:t>2/22/2026</a:t>
+              <a:t>3/5/2026</a:t>
             </a:fld>
             <a:endParaRPr lang="en-US" dirty="0"/>
           </a:p>
@@ -3057,7 +3058,7 @@
           <a:p>
             <a:fld id="{9EB8BD81-465B-40F2-9A54-9DF3B12AF598}" type="datetimeFigureOut">
               <a:rPr lang="en-US" dirty="0"/>
-              <a:t>2/22/2026</a:t>
+              <a:t>3/5/2026</a:t>
             </a:fld>
             <a:endParaRPr lang="en-US" dirty="0"/>
           </a:p>
@@ -3361,7 +3362,7 @@
           <a:p>
             <a:fld id="{F04B3CEF-64EF-4C43-9530-8E9CBFD2CAD1}" type="datetimeFigureOut">
               <a:rPr lang="en-US" dirty="0"/>
-              <a:t>2/22/2026</a:t>
+              <a:t>3/5/2026</a:t>
             </a:fld>
             <a:endParaRPr lang="en-US" dirty="0"/>
           </a:p>
@@ -3604,7 +3605,7 @@
           <a:p>
             <a:fld id="{B70A3DFD-A535-46B2-84C1-61DC8B16A904}" type="datetimeFigureOut">
               <a:rPr lang="en-US" dirty="0"/>
-              <a:t>2/22/2026</a:t>
+              <a:t>3/5/2026</a:t>
             </a:fld>
             <a:endParaRPr lang="en-US" dirty="0"/>
           </a:p>
@@ -4138,13 +4139,13 @@
   <p:clrMapOvr>
     <a:masterClrMapping/>
   </p:clrMapOvr>
-  <mc:AlternateContent xmlns:mc="http://schemas.openxmlformats.org/markup-compatibility/2006">
-    <mc:Choice xmlns:p15="http://schemas.microsoft.com/office/powerpoint/2012/main" Requires="p15">
-      <p:transition xmlns:p14="http://schemas.microsoft.com/office/powerpoint/2010/main" spd="slow" p14:dur="2000">
-        <p15:prstTrans prst="drape"/>
+  <mc:AlternateContent xmlns:mc="http://schemas.openxmlformats.org/markup-compatibility/2006" xmlns:p14="http://schemas.microsoft.com/office/powerpoint/2010/main">
+    <mc:Choice Requires="p14">
+      <p:transition spd="slow" p14:dur="1500">
+        <p14:window dir="vert"/>
       </p:transition>
     </mc:Choice>
-    <mc:Fallback>
+    <mc:Fallback xmlns="">
       <p:transition spd="slow">
         <p:fade/>
       </p:transition>
@@ -4221,22 +4222,7 @@
             <a:endParaRPr lang="hu-HU"/>
           </a:p>
           <a:p>
-            <a:endParaRPr lang="hu-HU" dirty="0"/>
-          </a:p>
-          <a:p>
-            <a:r>
-              <a:rPr lang="hu-HU" sz="2600" cap="all">
-                <a:latin typeface="Trade Gothic Next Cond"/>
-              </a:rPr>
-              <a:t>        </a:t>
-            </a:r>
-            <a:r>
-              <a:rPr lang="hu-HU" sz="2600" b="1" cap="all">
-                <a:latin typeface="Trade Gothic Next Cond"/>
-              </a:rPr>
-              <a:t>Köszönjük a figyelmet</a:t>
-            </a:r>
-            <a:endParaRPr lang="hu-HU" sz="2600" b="0"/>
+            <a:endParaRPr lang="hu-HU" b="0" dirty="0"/>
           </a:p>
         </p:txBody>
       </p:sp>
@@ -4262,7 +4248,7 @@
           <a:lstStyle/>
           <a:p>
             <a:fld id="{E47341BF-8616-4E70-8DDA-822E355C4481}" type="datetime1">
-              <a:t>2/22/2026</a:t>
+              <a:t>2026. 03. 05.</a:t>
             </a:fld>
             <a:endParaRPr lang="en-US" dirty="0"/>
           </a:p>
@@ -4326,6 +4312,36 @@
           </a:p>
         </p:txBody>
       </p:sp>
+      <p:pic>
+        <p:nvPicPr>
+          <p:cNvPr id="7" name="Kép 6" descr="A képen szöveg, poszter, Grafikus tervezés, rajzfilm látható&#10;&#10;Lehet, hogy az AI által létrehozott tartalom helytelen.">
+            <a:extLst>
+              <a:ext uri="{FF2B5EF4-FFF2-40B4-BE49-F238E27FC236}">
+                <a16:creationId xmlns:a16="http://schemas.microsoft.com/office/drawing/2014/main" id="{2FA2AEC3-279E-23AD-899E-3958F93144E5}"/>
+              </a:ext>
+            </a:extLst>
+          </p:cNvPr>
+          <p:cNvPicPr>
+            <a:picLocks noChangeAspect="1"/>
+          </p:cNvPicPr>
+          <p:nvPr/>
+        </p:nvPicPr>
+        <p:blipFill>
+          <a:blip r:embed="rId2"/>
+          <a:stretch>
+            <a:fillRect/>
+          </a:stretch>
+        </p:blipFill>
+        <p:spPr>
+          <a:xfrm>
+            <a:off x="1430655" y="713422"/>
+            <a:ext cx="9645650" cy="5441315"/>
+          </a:xfrm>
+          <a:prstGeom prst="rect">
+            <a:avLst/>
+          </a:prstGeom>
+        </p:spPr>
+      </p:pic>
     </p:spTree>
     <p:extLst>
       <p:ext uri="{BB962C8B-B14F-4D97-AF65-F5344CB8AC3E}">
@@ -4336,13 +4352,13 @@
   <p:clrMapOvr>
     <a:masterClrMapping/>
   </p:clrMapOvr>
-  <mc:AlternateContent xmlns:mc="http://schemas.openxmlformats.org/markup-compatibility/2006">
-    <mc:Choice xmlns:p14="http://schemas.microsoft.com/office/powerpoint/2010/main" Requires="p14">
+  <mc:AlternateContent xmlns:mc="http://schemas.openxmlformats.org/markup-compatibility/2006" xmlns:p14="http://schemas.microsoft.com/office/powerpoint/2010/main">
+    <mc:Choice Requires="p14">
       <p:transition spd="slow" p14:dur="2500">
         <p:checker/>
       </p:transition>
     </mc:Choice>
-    <mc:Fallback>
+    <mc:Fallback xmlns="">
       <p:transition spd="slow">
         <p:checker/>
       </p:transition>
@@ -4394,9 +4410,12 @@
                 <a:ea typeface="+mj-lt"/>
                 <a:cs typeface="+mj-lt"/>
               </a:rPr>
-              <a:t> Miért kritikus a jelszóbiztonság?</a:t>
-            </a:r>
-            <a:endParaRPr lang="hu-HU"/>
+              <a:t>Miért vagy te is célpont?</a:t>
+            </a:r>
+            <a:endParaRPr lang="hu-HU">
+              <a:ea typeface="+mj-lt"/>
+              <a:cs typeface="+mj-lt"/>
+            </a:endParaRPr>
           </a:p>
         </p:txBody>
       </p:sp>
@@ -4424,44 +4443,64 @@
           <a:lstStyle/>
           <a:p>
             <a:r>
+              <a:rPr lang="hu-HU" b="1">
+                <a:ea typeface="+mn-lt"/>
+                <a:cs typeface="+mn-lt"/>
+              </a:rPr>
+              <a:t>Tévhit:</a:t>
+            </a:r>
+            <a:r>
               <a:rPr lang="hu-HU">
                 <a:ea typeface="+mn-lt"/>
                 <a:cs typeface="+mn-lt"/>
               </a:rPr>
-              <a:t>A gyenge jelszavak a feltörések 80%-áért felelősek (brute force, szótár alapú támadások).</a:t>
+              <a:t> „Kicsi vagyok, nincs pénzem, nem érdeklem a hackereket.”</a:t>
+            </a:r>
+            <a:endParaRPr lang="hu-HU" dirty="0">
+              <a:ea typeface="+mn-lt"/>
+              <a:cs typeface="+mn-lt"/>
+            </a:endParaRPr>
+          </a:p>
+          <a:p>
+            <a:r>
+              <a:rPr lang="hu-HU" b="1">
+                <a:ea typeface="+mn-lt"/>
+                <a:cs typeface="+mn-lt"/>
+              </a:rPr>
+              <a:t>Valóság:</a:t>
+            </a:r>
+            <a:r>
+              <a:rPr lang="hu-HU">
+                <a:ea typeface="+mn-lt"/>
+                <a:cs typeface="+mn-lt"/>
+              </a:rPr>
+              <a:t> A robotprogramok nem válogatnak. Kell nekik a Discordod, az Instagramod vagy az e-mail címed, hogy onnan verjenek át másokat.</a:t>
             </a:r>
             <a:endParaRPr lang="hu-HU"/>
           </a:p>
           <a:p>
             <a:r>
+              <a:rPr lang="hu-HU" b="1">
+                <a:ea typeface="+mn-lt"/>
+                <a:cs typeface="+mn-lt"/>
+              </a:rPr>
+              <a:t>Statisztika:</a:t>
+            </a:r>
+            <a:r>
               <a:rPr lang="hu-HU">
                 <a:ea typeface="+mn-lt"/>
                 <a:cs typeface="+mn-lt"/>
               </a:rPr>
-              <a:t>A felhasználók hajlamosak egyszerű, könnyen megjegyezhető szavakat használni.</a:t>
+              <a:t> A feltörések 80%-a a gyenge jelszavak miatt történik.</a:t>
             </a:r>
             <a:endParaRPr lang="hu-HU"/>
           </a:p>
           <a:p>
-            <a:r>
-              <a:rPr lang="hu-HU" b="1">
-                <a:ea typeface="+mn-lt"/>
-                <a:cs typeface="+mn-lt"/>
-              </a:rPr>
-              <a:t>Cél:</a:t>
-            </a:r>
-            <a:r>
-              <a:rPr lang="hu-HU">
-                <a:ea typeface="+mn-lt"/>
-                <a:cs typeface="+mn-lt"/>
-              </a:rPr>
-              <a:t> Olyan alkalmazás, amely vizuálisan tanítja a felhasználót a biztonságosabb jelszóválasztásra.</a:t>
-            </a:r>
-            <a:endParaRPr lang="hu-HU"/>
-          </a:p>
-          <a:p>
             <a:endParaRPr lang="hu-HU" dirty="0"/>
           </a:p>
+          <a:p>
+            <a:endParaRPr lang="hu-HU" dirty="0"/>
+          </a:p>
         </p:txBody>
       </p:sp>
       <p:sp>
@@ -4486,7 +4525,7 @@
           <a:lstStyle/>
           <a:p>
             <a:fld id="{4B05DBD3-3016-4385-B904-7FEA02A28FE4}" type="datetime1">
-              <a:t>2/22/2026</a:t>
+              <a:t>2026. 03. 05.</a:t>
             </a:fld>
             <a:endParaRPr lang="en-US" dirty="0"/>
           </a:p>
@@ -4560,15 +4599,15 @@
   <p:clrMapOvr>
     <a:masterClrMapping/>
   </p:clrMapOvr>
-  <mc:AlternateContent xmlns:mc="http://schemas.openxmlformats.org/markup-compatibility/2006">
-    <mc:Choice xmlns:p14="http://schemas.microsoft.com/office/powerpoint/2010/main" Requires="p14">
-      <p:transition p14:dur="100">
-        <p:cut/>
+  <mc:AlternateContent xmlns:mc="http://schemas.openxmlformats.org/markup-compatibility/2006" xmlns:p15="http://schemas.microsoft.com/office/powerpoint/2012/main">
+    <mc:Choice Requires="p15">
+      <p:transition xmlns:p14="http://schemas.microsoft.com/office/powerpoint/2010/main" spd="slow" p14:dur="2000">
+        <p15:prstTrans prst="prestige"/>
       </p:transition>
     </mc:Choice>
-    <mc:Fallback>
-      <p:transition>
-        <p:cut/>
+    <mc:Fallback xmlns="">
+      <p:transition spd="slow">
+        <p:fade/>
       </p:transition>
     </mc:Fallback>
   </mc:AlternateContent>
@@ -4618,7 +4657,7 @@
                 <a:ea typeface="+mj-lt"/>
                 <a:cs typeface="+mj-lt"/>
               </a:rPr>
-              <a:t>Alkalmazás architektúra és eszközök</a:t>
+              <a:t>Mi az a „Brute Force” támadás?</a:t>
             </a:r>
             <a:endParaRPr lang="hu-HU"/>
           </a:p>
@@ -4648,11 +4687,32 @@
           <a:lstStyle/>
           <a:p>
             <a:r>
+              <a:rPr lang="hu-HU">
+                <a:ea typeface="+mn-lt"/>
+                <a:cs typeface="+mn-lt"/>
+              </a:rPr>
+              <a:t>Ez az, amit az appunkkal meg akarunk akadályozni.</a:t>
+            </a:r>
+            <a:endParaRPr lang="hu-HU">
+              <a:latin typeface="Trade Gothic Next Light"/>
+              <a:ea typeface="+mn-lt"/>
+              <a:cs typeface="+mn-lt"/>
+            </a:endParaRPr>
+          </a:p>
+          <a:p>
+            <a:r>
               <a:rPr lang="hu-HU" b="1">
                 <a:ea typeface="+mn-lt"/>
                 <a:cs typeface="+mn-lt"/>
               </a:rPr>
-              <a:t>Technológiai struktúra:</a:t>
+              <a:t>Hogyan működik?</a:t>
+            </a:r>
+            <a:r>
+              <a:rPr lang="hu-HU">
+                <a:ea typeface="+mn-lt"/>
+                <a:cs typeface="+mn-lt"/>
+              </a:rPr>
+              <a:t> A hacker gépe másodpercenként több millió jelszót próbál ki (mint egy széfnyitó robot).</a:t>
             </a:r>
             <a:endParaRPr lang="hu-HU"/>
           </a:p>
@@ -4662,82 +4722,18 @@
                 <a:ea typeface="+mn-lt"/>
                 <a:cs typeface="+mn-lt"/>
               </a:rPr>
-              <a:t>Android SDK:</a:t>
+              <a:t>Időfaktor:</a:t>
             </a:r>
             <a:r>
               <a:rPr lang="hu-HU">
                 <a:ea typeface="+mn-lt"/>
                 <a:cs typeface="+mn-lt"/>
               </a:rPr>
-              <a:t> A natív fejlesztés előnyei (sebesség, közvetlen UI elérés).</a:t>
+              <a:t> Egy 6 betűs jelszót (pl. „majom”) 1 másodperc alatt feltörnek. Egy 12 karakteres, vegyes jelszóhoz már évszázadok kellenek.</a:t>
             </a:r>
             <a:endParaRPr lang="hu-HU"/>
           </a:p>
           <a:p>
-            <a:r>
-              <a:rPr lang="hu-HU" b="1">
-                <a:ea typeface="+mn-lt"/>
-                <a:cs typeface="+mn-lt"/>
-              </a:rPr>
-              <a:t>Java:</a:t>
-            </a:r>
-            <a:r>
-              <a:rPr lang="hu-HU">
-                <a:ea typeface="+mn-lt"/>
-                <a:cs typeface="+mn-lt"/>
-              </a:rPr>
-              <a:t> Objektumorientált megközelítés az eseménykezeléshez.</a:t>
-            </a:r>
-            <a:endParaRPr lang="hu-HU"/>
-          </a:p>
-          <a:p>
-            <a:r>
-              <a:rPr lang="hu-HU" b="1">
-                <a:ea typeface="+mn-lt"/>
-                <a:cs typeface="+mn-lt"/>
-              </a:rPr>
-              <a:t>XML Layout:</a:t>
-            </a:r>
-            <a:r>
-              <a:rPr lang="hu-HU">
-                <a:ea typeface="+mn-lt"/>
-                <a:cs typeface="+mn-lt"/>
-              </a:rPr>
-              <a:t> Deklaratív felületkezelés a rugalmas megjelenítésért.</a:t>
-            </a:r>
-            <a:endParaRPr lang="hu-HU"/>
-          </a:p>
-          <a:p>
-            <a:r>
-              <a:rPr lang="hu-HU" b="1">
-                <a:ea typeface="+mn-lt"/>
-                <a:cs typeface="+mn-lt"/>
-              </a:rPr>
-              <a:t>Fő osztály:</a:t>
-            </a:r>
-            <a:r>
-              <a:rPr lang="hu-HU" dirty="0">
-                <a:ea typeface="+mn-lt"/>
-                <a:cs typeface="+mn-lt"/>
-              </a:rPr>
-              <a:t> </a:t>
-            </a:r>
-            <a:r>
-              <a:rPr lang="hu-HU">
-                <a:latin typeface="Consolas"/>
-              </a:rPr>
-              <a:t>MainActivity.java</a:t>
-            </a:r>
-            <a:r>
-              <a:rPr lang="hu-HU">
-                <a:ea typeface="+mn-lt"/>
-                <a:cs typeface="+mn-lt"/>
-              </a:rPr>
-              <a:t> – itt összpontosul a vezérlési logika.</a:t>
-            </a:r>
-            <a:endParaRPr lang="hu-HU"/>
-          </a:p>
-          <a:p>
             <a:endParaRPr lang="hu-HU" dirty="0"/>
           </a:p>
         </p:txBody>
@@ -4764,7 +4760,7 @@
           <a:lstStyle/>
           <a:p>
             <a:fld id="{4BC16FC4-7685-4F31-95A8-7080F6163159}" type="datetime1">
-              <a:t>2/22/2026</a:t>
+              <a:t>2026. 03. 05.</a:t>
             </a:fld>
             <a:endParaRPr lang="en-US" dirty="0"/>
           </a:p>
@@ -4838,9 +4834,18 @@
   <p:clrMapOvr>
     <a:masterClrMapping/>
   </p:clrMapOvr>
-  <p:transition spd="slow">
-    <p:push dir="u"/>
-  </p:transition>
+  <mc:AlternateContent xmlns:mc="http://schemas.openxmlformats.org/markup-compatibility/2006" xmlns:p15="http://schemas.microsoft.com/office/powerpoint/2012/main">
+    <mc:Choice Requires="p15">
+      <p:transition xmlns:p14="http://schemas.microsoft.com/office/powerpoint/2010/main" spd="slow" p14:dur="1250">
+        <p15:prstTrans prst="airplane"/>
+      </p:transition>
+    </mc:Choice>
+    <mc:Fallback xmlns="">
+      <p:transition spd="slow">
+        <p:fade/>
+      </p:transition>
+    </mc:Fallback>
+  </mc:AlternateContent>
 </p:sld>
 </file>
 
@@ -4883,13 +4888,9 @@
           <a:lstStyle/>
           <a:p>
             <a:r>
-              <a:rPr lang="hu-HU" b="0">
-                <a:ea typeface="+mj-lt"/>
-                <a:cs typeface="+mj-lt"/>
-              </a:rPr>
-              <a:t>Az eseményvezérelt programozás (TextWatcher)</a:t>
-            </a:r>
-            <a:endParaRPr lang="hu-HU"/>
+              <a:rPr lang="hu-HU"/>
+              <a:t>A mi megoldásunk: Az interaktív ellenőrző</a:t>
+            </a:r>
           </a:p>
         </p:txBody>
       </p:sp>
@@ -4921,52 +4922,51 @@
                 <a:ea typeface="+mn-lt"/>
                 <a:cs typeface="+mn-lt"/>
               </a:rPr>
-              <a:t>A mechanizmus:</a:t>
+              <a:t>Bemutatás:</a:t>
+            </a:r>
+            <a:r>
+              <a:rPr lang="hu-HU">
+                <a:ea typeface="+mn-lt"/>
+                <a:cs typeface="+mn-lt"/>
+              </a:rPr>
+              <a:t> Készítettünk egy Android alkalmazást, ami segít megtanulni a biztonságos jelszó építését.</a:t>
+            </a:r>
+          </a:p>
+          <a:p>
+            <a:r>
+              <a:rPr lang="hu-HU" b="1">
+                <a:ea typeface="+mn-lt"/>
+                <a:cs typeface="+mn-lt"/>
+              </a:rPr>
+              <a:t>Élő figyelem:</a:t>
+            </a:r>
+            <a:r>
+              <a:rPr lang="hu-HU">
+                <a:ea typeface="+mn-lt"/>
+                <a:cs typeface="+mn-lt"/>
+              </a:rPr>
+              <a:t> Nem kell gombot nyomni, az app gépelés közben, valós időben elemzi, amit beírsz.</a:t>
             </a:r>
             <a:endParaRPr lang="hu-HU"/>
           </a:p>
           <a:p>
             <a:r>
+              <a:rPr lang="hu-HU" b="1">
+                <a:ea typeface="+mn-lt"/>
+                <a:cs typeface="+mn-lt"/>
+              </a:rPr>
+              <a:t>Azonnali visszacsatolás:</a:t>
+            </a:r>
+            <a:r>
               <a:rPr lang="hu-HU">
                 <a:ea typeface="+mn-lt"/>
                 <a:cs typeface="+mn-lt"/>
               </a:rPr>
-              <a:t>A kód nem egy gombnyomásra vár, hanem folyamatosan "figyel".</a:t>
-            </a:r>
-            <a:endParaRPr lang="hu-HU"/>
-          </a:p>
-          <a:p>
-            <a:r>
-              <a:rPr lang="hu-HU">
-                <a:latin typeface="Consolas"/>
-              </a:rPr>
-              <a:t>onTextChanged</a:t>
-            </a:r>
-            <a:r>
-              <a:rPr lang="hu-HU">
-                <a:ea typeface="+mn-lt"/>
-                <a:cs typeface="+mn-lt"/>
-              </a:rPr>
-              <a:t> metódus: Minden egyes leütött karakter után újraszámolja a pontszámot.</a:t>
-            </a:r>
-            <a:endParaRPr lang="hu-HU"/>
-          </a:p>
-          <a:p>
-            <a:r>
-              <a:rPr lang="hu-HU" b="1">
-                <a:ea typeface="+mn-lt"/>
-                <a:cs typeface="+mn-lt"/>
-              </a:rPr>
-              <a:t>Előnye:</a:t>
-            </a:r>
-            <a:r>
-              <a:rPr lang="hu-HU">
-                <a:ea typeface="+mn-lt"/>
-                <a:cs typeface="+mn-lt"/>
-              </a:rPr>
-              <a:t> Azonnali visszacsatolás (Immediate Feedback Loop), ami javítja a felhasználói élményt.</a:t>
-            </a:r>
-            <a:endParaRPr lang="hu-HU"/>
+              <a:t> Látod a fejlődést, ahogy a jelszavad egyre erősebb lesz.</a:t>
+            </a:r>
+          </a:p>
+          <a:p>
+            <a:endParaRPr lang="hu-HU" b="1" dirty="0"/>
           </a:p>
           <a:p>
             <a:endParaRPr lang="hu-HU" dirty="0"/>
@@ -4995,7 +4995,7 @@
           <a:lstStyle/>
           <a:p>
             <a:fld id="{6BA072EA-AD5F-4694-A93A-A0867BCB5B75}" type="datetime1">
-              <a:t>2/22/2026</a:t>
+              <a:t>2026. 03. 05.</a:t>
             </a:fld>
             <a:endParaRPr lang="en-US" dirty="0"/>
           </a:p>
@@ -5070,7 +5070,7 @@
     <a:masterClrMapping/>
   </p:clrMapOvr>
   <p:transition spd="slow">
-    <p:comb/>
+    <p:wheel spokes="1"/>
   </p:transition>
 </p:sld>
 </file>
@@ -5118,7 +5118,7 @@
                 <a:ea typeface="+mj-lt"/>
                 <a:cs typeface="+mj-lt"/>
               </a:rPr>
-              <a:t>A pontozási algoritmus részletei</a:t>
+              <a:t>A színek nyelve – Mit üzen a rendszer?</a:t>
             </a:r>
             <a:endParaRPr lang="hu-HU"/>
           </a:p>
@@ -5152,89 +5152,130 @@
                 <a:ea typeface="+mn-lt"/>
                 <a:cs typeface="+mn-lt"/>
               </a:rPr>
-              <a:t>UI/UX Megoldások:</a:t>
-            </a:r>
-            <a:endParaRPr lang="hu-HU"/>
-          </a:p>
-          <a:p>
+              <a:t>Vizuális jelzések:</a:t>
+            </a:r>
             <a:r>
               <a:rPr lang="hu-HU">
                 <a:ea typeface="+mn-lt"/>
                 <a:cs typeface="+mn-lt"/>
               </a:rPr>
-              <a:t>A </a:t>
+              <a:t> A legtöbb modern oldalon regisztrációkor látsz egy csíkot a jelszó alatt. Tanulj meg olvasni belőle!</a:t>
+            </a:r>
+          </a:p>
+          <a:p>
+            <a:r>
+              <a:rPr lang="hu-HU">
+                <a:ea typeface="+mn-lt"/>
+                <a:cs typeface="+mn-lt"/>
+              </a:rPr>
+              <a:t>🔴 </a:t>
+            </a:r>
+            <a:r>
+              <a:rPr lang="hu-HU" b="1">
+                <a:ea typeface="+mn-lt"/>
+                <a:cs typeface="+mn-lt"/>
+              </a:rPr>
+              <a:t>Piros (Veszély):</a:t>
+            </a:r>
+            <a:r>
+              <a:rPr lang="hu-HU">
+                <a:ea typeface="+mn-lt"/>
+                <a:cs typeface="+mn-lt"/>
+              </a:rPr>
+              <a:t> Ez nem jelszó, csak egy szó. A hackereknek ez „ingyen belépő”. (Pl.: </a:t>
             </a:r>
             <a:r>
               <a:rPr lang="hu-HU">
                 <a:latin typeface="Consolas"/>
-              </a:rPr>
-              <a:t>ProgressBar</a:t>
+                <a:ea typeface="+mn-lt"/>
+                <a:cs typeface="+mn-lt"/>
+              </a:rPr>
+              <a:t>jelszo123</a:t>
             </a:r>
             <a:r>
               <a:rPr lang="hu-HU">
                 <a:ea typeface="+mn-lt"/>
                 <a:cs typeface="+mn-lt"/>
               </a:rPr>
-              <a:t> nem csak egy csúszka, hanem állapotjelző.</a:t>
-            </a:r>
-            <a:endParaRPr lang="hu-HU"/>
-          </a:p>
-          <a:p>
-            <a:r>
-              <a:rPr lang="hu-HU" b="1">
-                <a:ea typeface="+mn-lt"/>
-                <a:cs typeface="+mn-lt"/>
-              </a:rPr>
-              <a:t>Színkódolás pszichológiája:</a:t>
-            </a:r>
-            <a:r>
-              <a:rPr lang="hu-HU">
-                <a:ea typeface="+mn-lt"/>
-                <a:cs typeface="+mn-lt"/>
-              </a:rPr>
-              <a:t> * Vörös (Veszély/Gyenge)</a:t>
-            </a:r>
-            <a:endParaRPr lang="hu-HU"/>
-          </a:p>
-          <a:p>
-            <a:pPr lvl="1"/>
-            <a:r>
-              <a:rPr lang="hu-HU" b="0">
-                <a:ea typeface="+mn-lt"/>
-                <a:cs typeface="+mn-lt"/>
-              </a:rPr>
-              <a:t>Narancs (Figyelem/Közepes)</a:t>
-            </a:r>
-            <a:endParaRPr lang="hu-HU"/>
-          </a:p>
-          <a:p>
-            <a:pPr lvl="1"/>
-            <a:r>
-              <a:rPr lang="hu-HU" b="0">
-                <a:ea typeface="+mn-lt"/>
-                <a:cs typeface="+mn-lt"/>
-              </a:rPr>
-              <a:t>Zöld (Biztonság/Erős)</a:t>
-            </a:r>
-            <a:endParaRPr lang="hu-HU"/>
-          </a:p>
-          <a:p>
+              <a:t>, </a:t>
+            </a:r>
             <a:r>
               <a:rPr lang="hu-HU">
                 <a:latin typeface="Consolas"/>
-              </a:rPr>
-              <a:t>setProgressTintList</a:t>
+                <a:ea typeface="+mn-lt"/>
+                <a:cs typeface="+mn-lt"/>
+              </a:rPr>
+              <a:t>nagymama</a:t>
             </a:r>
             <a:r>
               <a:rPr lang="hu-HU">
                 <a:ea typeface="+mn-lt"/>
                 <a:cs typeface="+mn-lt"/>
               </a:rPr>
-              <a:t>: Programozott színváltás a pontszám küszöbértékei alapján.</a:t>
+              <a:t>)</a:t>
             </a:r>
             <a:endParaRPr lang="hu-HU"/>
           </a:p>
           <a:p>
+            <a:r>
+              <a:rPr lang="hu-HU">
+                <a:ea typeface="+mn-lt"/>
+                <a:cs typeface="+mn-lt"/>
+              </a:rPr>
+              <a:t>🟡 </a:t>
+            </a:r>
+            <a:r>
+              <a:rPr lang="hu-HU" b="1">
+                <a:ea typeface="+mn-lt"/>
+                <a:cs typeface="+mn-lt"/>
+              </a:rPr>
+              <a:t>Sárga/Narancs (Kockázatos):</a:t>
+            </a:r>
+            <a:r>
+              <a:rPr lang="hu-HU">
+                <a:ea typeface="+mn-lt"/>
+                <a:cs typeface="+mn-lt"/>
+              </a:rPr>
+              <a:t> Már van benne egy nagybetű vagy egy szám, de a hossza még kevés. Egy közepes erősségű gép pár óra alatt megfejti.</a:t>
+            </a:r>
+          </a:p>
+          <a:p>
+            <a:r>
+              <a:rPr lang="hu-HU">
+                <a:ea typeface="+mn-lt"/>
+                <a:cs typeface="+mn-lt"/>
+              </a:rPr>
+              <a:t>🟢 </a:t>
+            </a:r>
+            <a:r>
+              <a:rPr lang="hu-HU" b="1">
+                <a:ea typeface="+mn-lt"/>
+                <a:cs typeface="+mn-lt"/>
+              </a:rPr>
+              <a:t>Zöld (Biztonság):</a:t>
+            </a:r>
+            <a:r>
+              <a:rPr lang="hu-HU">
+                <a:ea typeface="+mn-lt"/>
+                <a:cs typeface="+mn-lt"/>
+              </a:rPr>
+              <a:t> Ez a cél! Hosszú, kusza, és tartalmaz jeleket. Ez az, ami megállítja a feltörő szoftvereket.</a:t>
+            </a:r>
+            <a:endParaRPr lang="hu-HU"/>
+          </a:p>
+          <a:p>
+            <a:pPr marL="0" indent="0">
+              <a:buNone/>
+            </a:pPr>
+            <a:endParaRPr lang="hu-HU" i="1" dirty="0">
+              <a:ea typeface="+mn-lt"/>
+              <a:cs typeface="+mn-lt"/>
+            </a:endParaRPr>
+          </a:p>
+          <a:p>
+            <a:endParaRPr lang="hu-HU" b="1" dirty="0"/>
+          </a:p>
+          <a:p>
             <a:endParaRPr lang="hu-HU" dirty="0"/>
           </a:p>
         </p:txBody>
@@ -5261,7 +5302,7 @@
           <a:lstStyle/>
           <a:p>
             <a:fld id="{FFCD7E4C-D8BA-47AE-A056-D587E1D3B2C8}" type="datetime1">
-              <a:t>2/22/2026</a:t>
+              <a:t>2026. 03. 05.</a:t>
             </a:fld>
             <a:endParaRPr lang="en-US" dirty="0"/>
           </a:p>
@@ -5335,13 +5376,13 @@
   <p:clrMapOvr>
     <a:masterClrMapping/>
   </p:clrMapOvr>
-  <mc:AlternateContent xmlns:mc="http://schemas.openxmlformats.org/markup-compatibility/2006">
-    <mc:Choice xmlns:p14="http://schemas.microsoft.com/office/powerpoint/2010/main" Requires="p14">
-      <p:transition spd="slow" p14:dur="1250">
-        <p14:flip dir="r"/>
+  <mc:AlternateContent xmlns:mc="http://schemas.openxmlformats.org/markup-compatibility/2006" xmlns:p14="http://schemas.microsoft.com/office/powerpoint/2010/main">
+    <mc:Choice Requires="p14">
+      <p:transition spd="slow" p14:dur="1400">
+        <p14:ripple/>
       </p:transition>
     </mc:Choice>
-    <mc:Fallback>
+    <mc:Fallback xmlns="">
       <p:transition spd="slow">
         <p:fade/>
       </p:transition>
@@ -5389,13 +5430,24 @@
           <a:lstStyle/>
           <a:p>
             <a:r>
-              <a:rPr lang="hu-HU" b="0">
+              <a:rPr lang="hu-HU" sz="1800">
+                <a:latin typeface="Trade Gothic Next Light"/>
                 <a:ea typeface="+mj-lt"/>
                 <a:cs typeface="+mj-lt"/>
               </a:rPr>
-              <a:t>Kétlépcsős validáció (Confirm Password)</a:t>
-            </a:r>
-            <a:endParaRPr lang="hu-HU"/>
+              <a:t>Miért kérik kétszer? (Confirm Password)</a:t>
+            </a:r>
+            <a:endParaRPr lang="hu-HU" sz="1800" b="0">
+              <a:solidFill>
+                <a:srgbClr val="000000"/>
+              </a:solidFill>
+              <a:latin typeface="Trade Gothic Next Light"/>
+              <a:ea typeface="+mj-lt"/>
+              <a:cs typeface="+mj-lt"/>
+            </a:endParaRPr>
+          </a:p>
+          <a:p>
+            <a:endParaRPr lang="hu-HU" b="0" dirty="0"/>
           </a:p>
         </p:txBody>
       </p:sp>
@@ -5427,109 +5479,61 @@
                 <a:ea typeface="+mn-lt"/>
                 <a:cs typeface="+mn-lt"/>
               </a:rPr>
-              <a:t>Logikai feltétel:</a:t>
-            </a:r>
-            <a:endParaRPr lang="hu-HU"/>
-          </a:p>
-          <a:p>
+              <a:t>A "Confirm" mező nem szivatás:</a:t>
+            </a:r>
             <a:r>
               <a:rPr lang="hu-HU">
                 <a:ea typeface="+mn-lt"/>
                 <a:cs typeface="+mn-lt"/>
               </a:rPr>
-              <a:t>A regisztrációs folyamatok leggyakoribb hibája az elgépelés.</a:t>
-            </a:r>
-            <a:endParaRPr lang="hu-HU"/>
-          </a:p>
-          <a:p>
+              <a:t> Nem azért kell kétszer beírni, hogy idegesítsenek, hanem hogy megvédjenek a saját sietségedtől.</a:t>
+            </a:r>
+            <a:endParaRPr lang="hu-HU" dirty="0">
+              <a:ea typeface="+mn-lt"/>
+              <a:cs typeface="+mn-lt"/>
+            </a:endParaRPr>
+          </a:p>
+          <a:p>
+            <a:r>
+              <a:rPr lang="hu-HU" b="1">
+                <a:ea typeface="+mn-lt"/>
+                <a:cs typeface="+mn-lt"/>
+              </a:rPr>
+              <a:t>Hogyan csináld okosan?</a:t>
+            </a:r>
             <a:r>
               <a:rPr lang="hu-HU">
                 <a:ea typeface="+mn-lt"/>
                 <a:cs typeface="+mn-lt"/>
               </a:rPr>
-              <a:t>A </a:t>
-            </a:r>
-            <a:r>
-              <a:rPr lang="hu-HU">
-                <a:latin typeface="Consolas"/>
-              </a:rPr>
-              <a:t>checkPasswordMatch()</a:t>
-            </a:r>
-            <a:r>
-              <a:rPr lang="hu-HU">
-                <a:ea typeface="+mn-lt"/>
-                <a:cs typeface="+mn-lt"/>
-              </a:rPr>
-              <a:t> funkció összehasonlítja a </a:t>
-            </a:r>
-            <a:r>
-              <a:rPr lang="hu-HU">
-                <a:latin typeface="Consolas"/>
-              </a:rPr>
-              <a:t>passwordInput</a:t>
-            </a:r>
-            <a:r>
-              <a:rPr lang="hu-HU">
-                <a:ea typeface="+mn-lt"/>
-                <a:cs typeface="+mn-lt"/>
-              </a:rPr>
-              <a:t> és </a:t>
-            </a:r>
-            <a:r>
-              <a:rPr lang="hu-HU">
-                <a:latin typeface="Consolas"/>
-              </a:rPr>
-              <a:t>confirmInput</a:t>
-            </a:r>
-            <a:r>
-              <a:rPr lang="hu-HU" dirty="0">
-                <a:ea typeface="+mn-lt"/>
-                <a:cs typeface="+mn-lt"/>
-              </a:rPr>
-              <a:t> </a:t>
-            </a:r>
-            <a:r>
-              <a:rPr lang="hu-HU">
-                <a:ea typeface="+mn-lt"/>
-                <a:cs typeface="+mn-lt"/>
-              </a:rPr>
-              <a:t>stringeket.</a:t>
-            </a:r>
-            <a:endParaRPr lang="hu-HU"/>
-          </a:p>
-          <a:p>
-            <a:r>
-              <a:rPr lang="hu-HU" b="1">
-                <a:ea typeface="+mn-lt"/>
-                <a:cs typeface="+mn-lt"/>
-              </a:rPr>
-              <a:t>Hiba jelzése:</a:t>
-            </a:r>
-            <a:r>
-              <a:rPr lang="hu-HU">
-                <a:ea typeface="+mn-lt"/>
-                <a:cs typeface="+mn-lt"/>
-              </a:rPr>
-              <a:t> Az Android beépített </a:t>
-            </a:r>
-            <a:r>
-              <a:rPr lang="hu-HU">
-                <a:latin typeface="Consolas"/>
-              </a:rPr>
-              <a:t>setError()</a:t>
-            </a:r>
-            <a:r>
-              <a:rPr lang="hu-HU">
-                <a:ea typeface="+mn-lt"/>
-                <a:cs typeface="+mn-lt"/>
-              </a:rPr>
-              <a:t> funkciója vizuális buborékkal jelzi a hibát a beviteli mezőben.</a:t>
-            </a:r>
-            <a:endParaRPr lang="hu-HU"/>
-          </a:p>
-          <a:p>
+              <a:t> * Ne másold át (Copy-Paste)!</a:t>
+            </a:r>
+          </a:p>
+          <a:p>
+            <a:r>
+              <a:rPr lang="hu-HU"/>
+              <a:t>Mindig gépeld be másodszorra is, hogy biztos legyél benne: az ujjaid azt írták, amit az agyad akart.</a:t>
+            </a:r>
             <a:endParaRPr lang="hu-HU" dirty="0"/>
           </a:p>
+          <a:p>
+            <a:endParaRPr lang="hu-HU" b="1" dirty="0">
+              <a:ea typeface="+mn-lt"/>
+              <a:cs typeface="+mn-lt"/>
+            </a:endParaRPr>
+          </a:p>
+          <a:p>
+            <a:endParaRPr lang="hu-HU" dirty="0">
+              <a:ea typeface="+mn-lt"/>
+              <a:cs typeface="+mn-lt"/>
+            </a:endParaRPr>
+          </a:p>
+          <a:p>
+            <a:endParaRPr lang="hu-HU" b="1" dirty="0"/>
+          </a:p>
+          <a:p>
+            <a:endParaRPr lang="hu-HU" dirty="0"/>
+          </a:p>
         </p:txBody>
       </p:sp>
       <p:sp>
@@ -5554,7 +5558,7 @@
           <a:lstStyle/>
           <a:p>
             <a:fld id="{F45ED717-A70F-4EF6-A9B4-2463244C6110}" type="datetime1">
-              <a:t>2/22/2026</a:t>
+              <a:t>2026. 03. 05.</a:t>
             </a:fld>
             <a:endParaRPr lang="en-US" dirty="0"/>
           </a:p>
@@ -5618,6 +5622,36 @@
           </a:p>
         </p:txBody>
       </p:sp>
+      <p:pic>
+        <p:nvPicPr>
+          <p:cNvPr id="8" name="Kép 7" descr="A képen kard, fém látható&#10;&#10;Lehet, hogy az AI által létrehozott tartalom helytelen.">
+            <a:extLst>
+              <a:ext uri="{FF2B5EF4-FFF2-40B4-BE49-F238E27FC236}">
+                <a16:creationId xmlns:a16="http://schemas.microsoft.com/office/drawing/2014/main" id="{2DA85D40-BFF4-72AC-8B52-16B48D8FE4B5}"/>
+              </a:ext>
+            </a:extLst>
+          </p:cNvPr>
+          <p:cNvPicPr>
+            <a:picLocks noChangeAspect="1"/>
+          </p:cNvPicPr>
+          <p:nvPr/>
+        </p:nvPicPr>
+        <p:blipFill>
+          <a:blip r:embed="rId2"/>
+          <a:stretch>
+            <a:fillRect/>
+          </a:stretch>
+        </p:blipFill>
+        <p:spPr>
+          <a:xfrm>
+            <a:off x="9508490" y="2858"/>
+            <a:ext cx="2684780" cy="2361565"/>
+          </a:xfrm>
+          <a:prstGeom prst="rect">
+            <a:avLst/>
+          </a:prstGeom>
+        </p:spPr>
+      </p:pic>
     </p:spTree>
     <p:extLst>
       <p:ext uri="{BB962C8B-B14F-4D97-AF65-F5344CB8AC3E}">
@@ -5628,13 +5662,13 @@
   <p:clrMapOvr>
     <a:masterClrMapping/>
   </p:clrMapOvr>
-  <mc:AlternateContent xmlns:mc="http://schemas.openxmlformats.org/markup-compatibility/2006">
-    <mc:Choice xmlns:p14="http://schemas.microsoft.com/office/powerpoint/2010/main" Requires="p14">
-      <p:transition spd="slow" p14:dur="1500">
-        <p14:window dir="vert"/>
+  <mc:AlternateContent xmlns:mc="http://schemas.openxmlformats.org/markup-compatibility/2006" xmlns:p14="http://schemas.microsoft.com/office/powerpoint/2010/main">
+    <mc:Choice Requires="p14">
+      <p:transition spd="slow" p14:dur="4000">
+        <p14:vortex dir="r"/>
       </p:transition>
     </mc:Choice>
-    <mc:Fallback>
+    <mc:Fallback xmlns="">
       <p:transition spd="slow">
         <p:fade/>
       </p:transition>
@@ -5686,7 +5720,7 @@
                 <a:ea typeface="+mj-lt"/>
                 <a:cs typeface="+mj-lt"/>
               </a:rPr>
-              <a:t>Forráskód elemzés - A kritikus részlet</a:t>
+              <a:t>A „Tökéletes Jelszó” receptje</a:t>
             </a:r>
             <a:endParaRPr lang="hu-HU"/>
           </a:p>
@@ -5720,67 +5754,130 @@
                 <a:ea typeface="+mn-lt"/>
                 <a:cs typeface="+mn-lt"/>
               </a:rPr>
-              <a:t>Kódmagyarázat:</a:t>
+              <a:t>Hossz:</a:t>
+            </a:r>
+            <a:r>
+              <a:rPr lang="hu-HU">
+                <a:ea typeface="+mn-lt"/>
+                <a:cs typeface="+mn-lt"/>
+              </a:rPr>
+              <a:t> Minimum 12 karakter.</a:t>
             </a:r>
             <a:endParaRPr lang="hu-HU"/>
           </a:p>
           <a:p>
             <a:r>
+              <a:rPr lang="hu-HU" b="1">
+                <a:ea typeface="+mn-lt"/>
+                <a:cs typeface="+mn-lt"/>
+              </a:rPr>
+              <a:t>Keverés:</a:t>
+            </a:r>
+            <a:r>
               <a:rPr lang="hu-HU">
                 <a:ea typeface="+mn-lt"/>
                 <a:cs typeface="+mn-lt"/>
               </a:rPr>
-              <a:t>Hogyan használjuk a </a:t>
+              <a:t> Használj kis- és nagybetűt, számot és egy különleges jelet (pl. </a:t>
             </a:r>
             <a:r>
               <a:rPr lang="hu-HU">
                 <a:latin typeface="Consolas"/>
-              </a:rPr>
-              <a:t>matches()</a:t>
+                <a:ea typeface="+mn-lt"/>
+                <a:cs typeface="+mn-lt"/>
+              </a:rPr>
+              <a:t>_</a:t>
             </a:r>
             <a:r>
               <a:rPr lang="hu-HU">
                 <a:ea typeface="+mn-lt"/>
                 <a:cs typeface="+mn-lt"/>
               </a:rPr>
-              <a:t> metódust és a Reguláris Kifejezéseket (Regex).</a:t>
-            </a:r>
-            <a:endParaRPr lang="hu-HU"/>
-          </a:p>
-          <a:p>
-            <a:r>
-              <a:rPr lang="hu-HU">
-                <a:ea typeface="+mn-lt"/>
-                <a:cs typeface="+mn-lt"/>
-              </a:rPr>
-              <a:t>Példa: </a:t>
+              <a:t>, </a:t>
             </a:r>
             <a:r>
               <a:rPr lang="hu-HU">
                 <a:latin typeface="Consolas"/>
-              </a:rPr>
-              <a:t>.*[A-Z].*</a:t>
+                <a:ea typeface="+mn-lt"/>
+                <a:cs typeface="+mn-lt"/>
+              </a:rPr>
+              <a:t>!</a:t>
             </a:r>
             <a:r>
               <a:rPr lang="hu-HU">
                 <a:ea typeface="+mn-lt"/>
                 <a:cs typeface="+mn-lt"/>
               </a:rPr>
-              <a:t> – Ez a kifejezés bármilyen szövegben megkeresi, van-e legalább egy nagybetű.</a:t>
+              <a:t>, </a:t>
+            </a:r>
+            <a:r>
+              <a:rPr lang="hu-HU">
+                <a:latin typeface="Consolas"/>
+                <a:ea typeface="+mn-lt"/>
+                <a:cs typeface="+mn-lt"/>
+              </a:rPr>
+              <a:t>?</a:t>
+            </a:r>
+            <a:r>
+              <a:rPr lang="hu-HU">
+                <a:ea typeface="+mn-lt"/>
+                <a:cs typeface="+mn-lt"/>
+              </a:rPr>
+              <a:t>).</a:t>
             </a:r>
             <a:endParaRPr lang="hu-HU"/>
           </a:p>
           <a:p>
             <a:r>
+              <a:rPr lang="hu-HU" b="1">
+                <a:ea typeface="+mn-lt"/>
+                <a:cs typeface="+mn-lt"/>
+              </a:rPr>
+              <a:t>Logika:</a:t>
+            </a:r>
+            <a:r>
               <a:rPr lang="hu-HU">
                 <a:ea typeface="+mn-lt"/>
                 <a:cs typeface="+mn-lt"/>
               </a:rPr>
-              <a:t>Az if-else elágazások sorrendisége és a pontszámok halmozódása.</a:t>
+              <a:t> Ne használj neveket, dátumokat vagy olyan szavakat, amik szerepelnek a szótárban.</a:t>
             </a:r>
             <a:endParaRPr lang="hu-HU"/>
           </a:p>
           <a:p>
+            <a:r>
+              <a:rPr lang="hu-HU" b="1">
+                <a:ea typeface="+mn-lt"/>
+                <a:cs typeface="+mn-lt"/>
+              </a:rPr>
+              <a:t>Tipp:</a:t>
+            </a:r>
+            <a:r>
+              <a:rPr lang="hu-HU">
+                <a:ea typeface="+mn-lt"/>
+                <a:cs typeface="+mn-lt"/>
+              </a:rPr>
+              <a:t> Használj „jelmondatokat”! (Pl. </a:t>
+            </a:r>
+            <a:r>
+              <a:rPr lang="hu-HU" i="1">
+                <a:ea typeface="+mn-lt"/>
+                <a:cs typeface="+mn-lt"/>
+              </a:rPr>
+              <a:t>Kicsi_Kutya-Eszik_26!</a:t>
+            </a:r>
+            <a:r>
+              <a:rPr lang="hu-HU">
+                <a:ea typeface="+mn-lt"/>
+                <a:cs typeface="+mn-lt"/>
+              </a:rPr>
+              <a:t>) – könnyebb megjegyezni, mégis brutálisan erős.</a:t>
+            </a:r>
+          </a:p>
+          <a:p>
+            <a:endParaRPr lang="hu-HU" b="1" dirty="0"/>
+          </a:p>
+          <a:p>
             <a:endParaRPr lang="hu-HU" dirty="0"/>
           </a:p>
         </p:txBody>
@@ -5807,7 +5904,7 @@
           <a:lstStyle/>
           <a:p>
             <a:fld id="{CEB36FDD-A6DE-45F9-A548-4842FFF743E1}" type="datetime1">
-              <a:t>2/22/2026</a:t>
+              <a:t>2026. 03. 05.</a:t>
             </a:fld>
             <a:endParaRPr lang="en-US" dirty="0"/>
           </a:p>
@@ -5871,6 +5968,36 @@
           </a:p>
         </p:txBody>
       </p:sp>
+      <p:pic>
+        <p:nvPicPr>
+          <p:cNvPr id="7" name="Kép 6">
+            <a:extLst>
+              <a:ext uri="{FF2B5EF4-FFF2-40B4-BE49-F238E27FC236}">
+                <a16:creationId xmlns:a16="http://schemas.microsoft.com/office/drawing/2014/main" id="{014B35E6-03FC-5B3D-0605-F10121843A21}"/>
+              </a:ext>
+            </a:extLst>
+          </p:cNvPr>
+          <p:cNvPicPr>
+            <a:picLocks noChangeAspect="1"/>
+          </p:cNvPicPr>
+          <p:nvPr/>
+        </p:nvPicPr>
+        <p:blipFill>
+          <a:blip r:embed="rId2"/>
+          <a:stretch>
+            <a:fillRect/>
+          </a:stretch>
+        </p:blipFill>
+        <p:spPr>
+          <a:xfrm>
+            <a:off x="9260840" y="0"/>
+            <a:ext cx="2936240" cy="2936240"/>
+          </a:xfrm>
+          <a:prstGeom prst="rect">
+            <a:avLst/>
+          </a:prstGeom>
+        </p:spPr>
+      </p:pic>
     </p:spTree>
     <p:extLst>
       <p:ext uri="{BB962C8B-B14F-4D97-AF65-F5344CB8AC3E}">
@@ -5881,13 +6008,13 @@
   <p:clrMapOvr>
     <a:masterClrMapping/>
   </p:clrMapOvr>
-  <mc:AlternateContent xmlns:mc="http://schemas.openxmlformats.org/markup-compatibility/2006">
-    <mc:Choice xmlns:p14="http://schemas.microsoft.com/office/powerpoint/2010/main" Requires="p14">
-      <p:transition spd="slow" p14:dur="900">
-        <p14:warp dir="in"/>
+  <mc:AlternateContent xmlns:mc="http://schemas.openxmlformats.org/markup-compatibility/2006" xmlns:p14="http://schemas.microsoft.com/office/powerpoint/2010/main">
+    <mc:Choice Requires="p14">
+      <p:transition spd="slow" p14:dur="1400">
+        <p14:doors dir="vert"/>
       </p:transition>
     </mc:Choice>
-    <mc:Fallback>
+    <mc:Fallback xmlns="">
       <p:transition spd="slow">
         <p:fade/>
       </p:transition>
@@ -5939,7 +6066,7 @@
                 <a:ea typeface="+mj-lt"/>
                 <a:cs typeface="+mj-lt"/>
               </a:rPr>
-              <a:t>Biztonsági javaslatok a jövőre nézve</a:t>
+              <a:t>Hol tárold őket? (Jelszókezelők)</a:t>
             </a:r>
             <a:endParaRPr lang="hu-HU"/>
           </a:p>
@@ -5969,13 +6096,26 @@
           <a:lstStyle/>
           <a:p>
             <a:r>
+              <a:rPr lang="hu-HU">
+                <a:ea typeface="+mn-lt"/>
+                <a:cs typeface="+mn-lt"/>
+              </a:rPr>
+              <a:t>Mivel mindenhol más jelszó kell, emberileg lehetetlen mindet megjegyezni.</a:t>
+            </a:r>
+            <a:endParaRPr lang="hu-HU"/>
+          </a:p>
+          <a:p>
+            <a:r>
               <a:rPr lang="hu-HU" b="1">
                 <a:ea typeface="+mn-lt"/>
                 <a:cs typeface="+mn-lt"/>
               </a:rPr>
-              <a:t>Hogyan lehetne még profibb?</a:t>
-            </a:r>
-            <a:endParaRPr lang="hu-HU"/>
+              <a:t>Ajánlott appok:</a:t>
+            </a:r>
+            <a:endParaRPr lang="hu-HU">
+              <a:ea typeface="+mn-lt"/>
+              <a:cs typeface="+mn-lt"/>
+            </a:endParaRPr>
           </a:p>
           <a:p>
             <a:r>
@@ -5983,16 +6123,15 @@
                 <a:ea typeface="+mn-lt"/>
                 <a:cs typeface="+mn-lt"/>
               </a:rPr>
-              <a:t>Lejárati idő:</a:t>
+              <a:t>Bitwarden:</a:t>
             </a:r>
             <a:r>
               <a:rPr lang="hu-HU">
                 <a:ea typeface="+mn-lt"/>
                 <a:cs typeface="+mn-lt"/>
               </a:rPr>
-              <a:t> Kényszerített jelszócsere implementálása.</a:t>
-            </a:r>
-            <a:endParaRPr lang="hu-HU"/>
+              <a:t> Ingyenes, nyílt forráskódú.</a:t>
+            </a:r>
           </a:p>
           <a:p>
             <a:r>
@@ -6000,16 +6139,15 @@
                 <a:ea typeface="+mn-lt"/>
                 <a:cs typeface="+mn-lt"/>
               </a:rPr>
-              <a:t>Hashing:</a:t>
+              <a:t>Proton Pass:</a:t>
             </a:r>
             <a:r>
               <a:rPr lang="hu-HU">
                 <a:ea typeface="+mn-lt"/>
                 <a:cs typeface="+mn-lt"/>
               </a:rPr>
-              <a:t> A jelszavakat sosem plain textként, hanem titkosítva (pl. BCrypt, SHA-256) kell tárolni az adatbázisban.</a:t>
-            </a:r>
-            <a:endParaRPr lang="hu-HU"/>
+              <a:t> Modern, magyarul is tud.</a:t>
+            </a:r>
           </a:p>
           <a:p>
             <a:r>
@@ -6017,29 +6155,34 @@
                 <a:ea typeface="+mn-lt"/>
                 <a:cs typeface="+mn-lt"/>
               </a:rPr>
-              <a:t>Complexity API:</a:t>
+              <a:t>1Password:</a:t>
             </a:r>
             <a:r>
               <a:rPr lang="hu-HU">
                 <a:ea typeface="+mn-lt"/>
                 <a:cs typeface="+mn-lt"/>
               </a:rPr>
-              <a:t> Külső könyvtárak (pl. Google </a:t>
+              <a:t> A legkényelmesebb fizetős megoldás.</a:t>
+            </a:r>
+          </a:p>
+          <a:p>
+            <a:r>
+              <a:rPr lang="hu-HU" b="1">
+                <a:ea typeface="+mn-lt"/>
+                <a:cs typeface="+mn-lt"/>
+              </a:rPr>
+              <a:t>Mesterjelszó:</a:t>
             </a:r>
             <a:r>
               <a:rPr lang="hu-HU">
-                <a:latin typeface="Consolas"/>
-              </a:rPr>
-              <a:t>autofill</a:t>
-            </a:r>
-            <a:r>
-              <a:rPr lang="hu-HU">
-                <a:ea typeface="+mn-lt"/>
-                <a:cs typeface="+mn-lt"/>
-              </a:rPr>
-              <a:t>) használata.</a:t>
-            </a:r>
-            <a:endParaRPr lang="hu-HU"/>
+                <a:ea typeface="+mn-lt"/>
+                <a:cs typeface="+mn-lt"/>
+              </a:rPr>
+              <a:t> Csak EGYETLEN nagyon erős jelszót kell tudnod fejből, az app vigyáz a többire.</a:t>
+            </a:r>
+          </a:p>
+          <a:p>
+            <a:endParaRPr lang="hu-HU" b="1" dirty="0"/>
           </a:p>
           <a:p>
             <a:endParaRPr lang="hu-HU" dirty="0"/>
@@ -6068,7 +6211,7 @@
           <a:lstStyle/>
           <a:p>
             <a:fld id="{2483636E-BEBF-468D-BF71-9E60497FB5A8}" type="datetime1">
-              <a:t>2/22/2026</a:t>
+              <a:t>2026. 03. 05.</a:t>
             </a:fld>
             <a:endParaRPr lang="en-US" dirty="0"/>
           </a:p>
@@ -6142,15 +6285,15 @@
   <p:clrMapOvr>
     <a:masterClrMapping/>
   </p:clrMapOvr>
-  <mc:AlternateContent xmlns:mc="http://schemas.openxmlformats.org/markup-compatibility/2006">
-    <mc:Choice xmlns:p14="http://schemas.microsoft.com/office/powerpoint/2010/main" Requires="p14">
-      <p:transition spd="slow" p14:dur="1600">
-        <p14:prism isContent="1" isInverted="1"/>
+  <mc:AlternateContent xmlns:mc="http://schemas.openxmlformats.org/markup-compatibility/2006" xmlns:p14="http://schemas.microsoft.com/office/powerpoint/2010/main">
+    <mc:Choice Requires="p14">
+      <p:transition spd="slow" p14:dur="1200">
+        <p:dissolve/>
       </p:transition>
     </mc:Choice>
-    <mc:Fallback>
+    <mc:Fallback xmlns="">
       <p:transition spd="slow">
-        <p:fade/>
+        <p:dissolve/>
       </p:transition>
     </mc:Fallback>
   </mc:AlternateContent>
@@ -6200,7 +6343,7 @@
                 <a:ea typeface="+mj-lt"/>
                 <a:cs typeface="+mj-lt"/>
               </a:rPr>
-              <a:t>Összegzés és konklúzió</a:t>
+              <a:t>Összegzés és tanácsok</a:t>
             </a:r>
             <a:endParaRPr lang="hu-HU"/>
           </a:p>
@@ -6234,46 +6377,75 @@
                 <a:ea typeface="+mn-lt"/>
                 <a:cs typeface="+mn-lt"/>
               </a:rPr>
-              <a:t>Záró gondolatok:</a:t>
+              <a:t>Soha</a:t>
+            </a:r>
+            <a:r>
+              <a:rPr lang="hu-HU">
+                <a:ea typeface="+mn-lt"/>
+                <a:cs typeface="+mn-lt"/>
+              </a:rPr>
+              <a:t> ne add meg a jelszavadat senkinek (még a Facebook-adminnak sem kérik el!).</a:t>
             </a:r>
             <a:endParaRPr lang="hu-HU"/>
           </a:p>
           <a:p>
             <a:r>
+              <a:rPr lang="hu-HU" b="1">
+                <a:ea typeface="+mn-lt"/>
+                <a:cs typeface="+mn-lt"/>
+              </a:rPr>
+              <a:t>Használd</a:t>
+            </a:r>
+            <a:r>
               <a:rPr lang="hu-HU">
                 <a:ea typeface="+mn-lt"/>
                 <a:cs typeface="+mn-lt"/>
               </a:rPr>
-              <a:t>Egy egyszerű jelszóerősség-mérő jelentősen csökkenti a fiókfeltörések esélyét.</a:t>
+              <a:t> az appunkat gyakorlásra!</a:t>
             </a:r>
             <a:endParaRPr lang="hu-HU"/>
           </a:p>
           <a:p>
             <a:r>
+              <a:rPr lang="hu-HU" b="1">
+                <a:ea typeface="+mn-lt"/>
+                <a:cs typeface="+mn-lt"/>
+              </a:rPr>
+              <a:t>Frissíts:</a:t>
+            </a:r>
+            <a:r>
               <a:rPr lang="hu-HU">
                 <a:ea typeface="+mn-lt"/>
                 <a:cs typeface="+mn-lt"/>
               </a:rPr>
-              <a:t>A fejlesztő felelőssége a felhasználót a biztonság felé terelni.</a:t>
+              <a:t> Ha gyanús e-mailt kapsz, változtass jelszót.</a:t>
+            </a:r>
+          </a:p>
+          <a:p>
+            <a:r>
+              <a:rPr lang="hu-HU" b="1">
+                <a:ea typeface="+mn-lt"/>
+                <a:cs typeface="+mn-lt"/>
+              </a:rPr>
+              <a:t>Kérdések?</a:t>
+            </a:r>
+            <a:r>
+              <a:rPr lang="hu-HU">
+                <a:ea typeface="+mn-lt"/>
+                <a:cs typeface="+mn-lt"/>
+              </a:rPr>
+              <a:t> Szívesen válaszolunk!</a:t>
             </a:r>
             <a:endParaRPr lang="hu-HU"/>
           </a:p>
           <a:p>
-            <a:r>
-              <a:rPr lang="hu-HU" b="1">
-                <a:ea typeface="+mn-lt"/>
-                <a:cs typeface="+mn-lt"/>
-              </a:rPr>
-              <a:t>Kérdések:</a:t>
-            </a:r>
-            <a:r>
-              <a:rPr lang="hu-HU">
-                <a:ea typeface="+mn-lt"/>
-                <a:cs typeface="+mn-lt"/>
-              </a:rPr>
-              <a:t> Szívesen válaszolok a kóddal vagy a megvalósítással kapcsolatban.</a:t>
-            </a:r>
-            <a:endParaRPr lang="hu-HU"/>
+            <a:endParaRPr lang="hu-HU" dirty="0">
+              <a:ea typeface="+mn-lt"/>
+              <a:cs typeface="+mn-lt"/>
+            </a:endParaRPr>
+          </a:p>
+          <a:p>
+            <a:endParaRPr lang="hu-HU" b="1" dirty="0"/>
           </a:p>
           <a:p>
             <a:endParaRPr lang="hu-HU" dirty="0"/>
@@ -6302,7 +6474,7 @@
           <a:lstStyle/>
           <a:p>
             <a:fld id="{85FAA34E-26F8-4895-BA35-2C8B4CDA85CD}" type="datetime1">
-              <a:t>2/22/2026</a:t>
+              <a:t>2026. 03. 05.</a:t>
             </a:fld>
             <a:endParaRPr lang="en-US" dirty="0"/>
           </a:p>
@@ -6376,13 +6548,13 @@
   <p:clrMapOvr>
     <a:masterClrMapping/>
   </p:clrMapOvr>
-  <mc:AlternateContent xmlns:mc="http://schemas.openxmlformats.org/markup-compatibility/2006">
-    <mc:Choice xmlns:p14="http://schemas.microsoft.com/office/powerpoint/2010/main" Requires="p14">
+  <mc:AlternateContent xmlns:mc="http://schemas.openxmlformats.org/markup-compatibility/2006" xmlns:p14="http://schemas.microsoft.com/office/powerpoint/2010/main">
+    <mc:Choice Requires="p14">
       <p:transition spd="slow" p14:dur="1300">
         <p14:pan dir="u"/>
       </p:transition>
     </mc:Choice>
-    <mc:Fallback>
+    <mc:Fallback xmlns="">
       <p:transition spd="slow">
         <p:fade/>
       </p:transition>
